--- a/data-eng/decks/w6d2s1.pptx
+++ b/data-eng/decks/w6d2s1.pptx
@@ -3100,7 +3100,7 @@
       <p:grpSpPr/>
       <p:sp>
         <p:nvSpPr>
-          <p:cNvPr id="2" name="Oval 1"/>
+          <p:cNvPr id="2" name="deckgen:decor"/>
           <p:cNvSpPr/>
           <p:nvPr/>
         </p:nvSpPr>
@@ -3130,7 +3130,7 @@
       </p:sp>
       <p:sp>
         <p:nvSpPr>
-          <p:cNvPr id="3" name="Oval 2"/>
+          <p:cNvPr id="3" name="deckgen:decor"/>
           <p:cNvSpPr/>
           <p:nvPr/>
         </p:nvSpPr>
@@ -3160,7 +3160,7 @@
       </p:sp>
       <p:sp>
         <p:nvSpPr>
-          <p:cNvPr id="4" name="Oval 3"/>
+          <p:cNvPr id="4" name="deckgen:decor"/>
           <p:cNvSpPr/>
           <p:nvPr/>
         </p:nvSpPr>
@@ -3190,7 +3190,7 @@
       </p:sp>
       <p:sp>
         <p:nvSpPr>
-          <p:cNvPr id="5" name="Rectangle 4"/>
+          <p:cNvPr id="5" name="deckgen:decor"/>
           <p:cNvSpPr/>
           <p:nvPr/>
         </p:nvSpPr>
@@ -3220,7 +3220,7 @@
       </p:sp>
       <p:sp>
         <p:nvSpPr>
-          <p:cNvPr id="6" name="Oval 5"/>
+          <p:cNvPr id="6" name="deckgen:decor"/>
           <p:cNvSpPr/>
           <p:nvPr/>
         </p:nvSpPr>
@@ -3250,7 +3250,7 @@
       </p:sp>
       <p:sp>
         <p:nvSpPr>
-          <p:cNvPr id="7" name="Oval 6"/>
+          <p:cNvPr id="7" name="deckgen:decor"/>
           <p:cNvSpPr/>
           <p:nvPr/>
         </p:nvSpPr>
@@ -3280,7 +3280,7 @@
       </p:sp>
       <p:sp>
         <p:nvSpPr>
-          <p:cNvPr id="8" name="Oval 7"/>
+          <p:cNvPr id="8" name="deckgen:decor"/>
           <p:cNvSpPr/>
           <p:nvPr/>
         </p:nvSpPr>
@@ -3310,7 +3310,7 @@
       </p:sp>
       <p:sp>
         <p:nvSpPr>
-          <p:cNvPr id="9" name="Oval 8"/>
+          <p:cNvPr id="9" name="deckgen:decor"/>
           <p:cNvSpPr/>
           <p:nvPr/>
         </p:nvSpPr>
@@ -3340,7 +3340,7 @@
       </p:sp>
       <p:sp>
         <p:nvSpPr>
-          <p:cNvPr id="10" name="Rectangle 9"/>
+          <p:cNvPr id="10" name="deckgen:decor"/>
           <p:cNvSpPr/>
           <p:nvPr/>
         </p:nvSpPr>
@@ -3600,7 +3600,7 @@
       <p:grpSpPr/>
       <p:sp>
         <p:nvSpPr>
-          <p:cNvPr id="2" name="Oval 1"/>
+          <p:cNvPr id="2" name="deckgen:decor"/>
           <p:cNvSpPr/>
           <p:nvPr/>
         </p:nvSpPr>
@@ -3630,7 +3630,7 @@
       </p:sp>
       <p:sp>
         <p:nvSpPr>
-          <p:cNvPr id="3" name="Oval 2"/>
+          <p:cNvPr id="3" name="deckgen:decor"/>
           <p:cNvSpPr/>
           <p:nvPr/>
         </p:nvSpPr>
@@ -3660,7 +3660,7 @@
       </p:sp>
       <p:sp>
         <p:nvSpPr>
-          <p:cNvPr id="4" name="Oval 3"/>
+          <p:cNvPr id="4" name="deckgen:decor"/>
           <p:cNvSpPr/>
           <p:nvPr/>
         </p:nvSpPr>
@@ -4662,7 +4662,7 @@
       <p:grpSpPr/>
       <p:sp>
         <p:nvSpPr>
-          <p:cNvPr id="2" name="Oval 1"/>
+          <p:cNvPr id="2" name="deckgen:decor"/>
           <p:cNvSpPr/>
           <p:nvPr/>
         </p:nvSpPr>
@@ -4692,7 +4692,7 @@
       </p:sp>
       <p:sp>
         <p:nvSpPr>
-          <p:cNvPr id="3" name="Oval 2"/>
+          <p:cNvPr id="3" name="deckgen:decor"/>
           <p:cNvSpPr/>
           <p:nvPr/>
         </p:nvSpPr>
@@ -4915,7 +4915,7 @@
         </p:nvSpPr>
         <p:spPr>
           <a:xfrm>
-            <a:off x="1428750" y="5486400"/>
+            <a:off x="1428750" y="5476875"/>
             <a:ext cx="419100" cy="381000"/>
           </a:xfrm>
           <a:prstGeom prst="rect">
@@ -4956,7 +4956,7 @@
         </p:nvSpPr>
         <p:spPr>
           <a:xfrm>
-            <a:off x="1905000" y="5486400"/>
+            <a:off x="1905000" y="5476875"/>
             <a:ext cx="6724650" cy="381000"/>
           </a:xfrm>
           <a:prstGeom prst="rect">
@@ -5031,7 +5031,7 @@
         </p:nvSpPr>
         <p:spPr>
           <a:xfrm>
-            <a:off x="9658350" y="5486400"/>
+            <a:off x="9658350" y="5476875"/>
             <a:ext cx="419100" cy="381000"/>
           </a:xfrm>
           <a:prstGeom prst="rect">
@@ -5072,7 +5072,7 @@
         </p:nvSpPr>
         <p:spPr>
           <a:xfrm>
-            <a:off x="10134600" y="5486400"/>
+            <a:off x="10134600" y="5476875"/>
             <a:ext cx="6724650" cy="381000"/>
           </a:xfrm>
           <a:prstGeom prst="rect">
@@ -5147,7 +5147,7 @@
         </p:nvSpPr>
         <p:spPr>
           <a:xfrm>
-            <a:off x="1428750" y="6515100"/>
+            <a:off x="1428750" y="6505575"/>
             <a:ext cx="419100" cy="381000"/>
           </a:xfrm>
           <a:prstGeom prst="rect">
@@ -5188,7 +5188,7 @@
         </p:nvSpPr>
         <p:spPr>
           <a:xfrm>
-            <a:off x="1905000" y="6515100"/>
+            <a:off x="1905000" y="6505575"/>
             <a:ext cx="6724650" cy="381000"/>
           </a:xfrm>
           <a:prstGeom prst="rect">
@@ -5263,7 +5263,7 @@
         </p:nvSpPr>
         <p:spPr>
           <a:xfrm>
-            <a:off x="9658350" y="6515100"/>
+            <a:off x="9658350" y="6505575"/>
             <a:ext cx="419100" cy="381000"/>
           </a:xfrm>
           <a:prstGeom prst="rect">
@@ -5304,7 +5304,7 @@
         </p:nvSpPr>
         <p:spPr>
           <a:xfrm>
-            <a:off x="10134600" y="6515100"/>
+            <a:off x="10134600" y="6505575"/>
             <a:ext cx="6724650" cy="381000"/>
           </a:xfrm>
           <a:prstGeom prst="rect">
@@ -5444,7 +5444,7 @@
                 <a:ea typeface="Pretendard"/>
                 <a:cs typeface="Pretendard"/>
               </a:rPr>
-              <a:t>docker rm -f kafka · week6/ 폴더</a:t>
+              <a:t>docker rm -fv kafka · week6 폴더</a:t>
             </a:r>
           </a:p>
         </p:txBody>
@@ -5469,7 +5469,7 @@
       <p:grpSpPr/>
       <p:sp>
         <p:nvSpPr>
-          <p:cNvPr id="2" name="Oval 1"/>
+          <p:cNvPr id="2" name="deckgen:decor"/>
           <p:cNvSpPr/>
           <p:nvPr/>
         </p:nvSpPr>
@@ -5499,7 +5499,7 @@
       </p:sp>
       <p:sp>
         <p:nvSpPr>
-          <p:cNvPr id="3" name="Oval 2"/>
+          <p:cNvPr id="3" name="deckgen:decor"/>
           <p:cNvSpPr/>
           <p:nvPr/>
         </p:nvSpPr>
@@ -5529,7 +5529,7 @@
       </p:sp>
       <p:sp>
         <p:nvSpPr>
-          <p:cNvPr id="4" name="Oval 3"/>
+          <p:cNvPr id="4" name="deckgen:decor"/>
           <p:cNvSpPr/>
           <p:nvPr/>
         </p:nvSpPr>
@@ -6460,7 +6460,7 @@
       <p:grpSpPr/>
       <p:sp>
         <p:nvSpPr>
-          <p:cNvPr id="2" name="Oval 1"/>
+          <p:cNvPr id="2" name="deckgen:decor"/>
           <p:cNvSpPr/>
           <p:nvPr/>
         </p:nvSpPr>
@@ -6490,7 +6490,7 @@
       </p:sp>
       <p:sp>
         <p:nvSpPr>
-          <p:cNvPr id="3" name="Oval 2"/>
+          <p:cNvPr id="3" name="deckgen:decor"/>
           <p:cNvSpPr/>
           <p:nvPr/>
         </p:nvSpPr>
@@ -6520,7 +6520,7 @@
       </p:sp>
       <p:sp>
         <p:nvSpPr>
-          <p:cNvPr id="4" name="Oval 3"/>
+          <p:cNvPr id="4" name="deckgen:decor"/>
           <p:cNvSpPr/>
           <p:nvPr/>
         </p:nvSpPr>
@@ -7460,7 +7460,7 @@
       <p:grpSpPr/>
       <p:sp>
         <p:nvSpPr>
-          <p:cNvPr id="2" name="Oval 1"/>
+          <p:cNvPr id="2" name="deckgen:decor"/>
           <p:cNvSpPr/>
           <p:nvPr/>
         </p:nvSpPr>
@@ -7490,7 +7490,7 @@
       </p:sp>
       <p:sp>
         <p:nvSpPr>
-          <p:cNvPr id="3" name="Oval 2"/>
+          <p:cNvPr id="3" name="deckgen:decor"/>
           <p:cNvSpPr/>
           <p:nvPr/>
         </p:nvSpPr>
@@ -7520,7 +7520,7 @@
       </p:sp>
       <p:sp>
         <p:nvSpPr>
-          <p:cNvPr id="4" name="Oval 3"/>
+          <p:cNvPr id="4" name="deckgen:decor"/>
           <p:cNvSpPr/>
           <p:nvPr/>
         </p:nvSpPr>
@@ -8521,7 +8521,7 @@
       <p:grpSpPr/>
       <p:sp>
         <p:nvSpPr>
-          <p:cNvPr id="2" name="Oval 1"/>
+          <p:cNvPr id="2" name="deckgen:decor"/>
           <p:cNvSpPr/>
           <p:nvPr/>
         </p:nvSpPr>
@@ -8551,7 +8551,7 @@
       </p:sp>
       <p:sp>
         <p:nvSpPr>
-          <p:cNvPr id="3" name="Oval 2"/>
+          <p:cNvPr id="3" name="deckgen:decor"/>
           <p:cNvSpPr/>
           <p:nvPr/>
         </p:nvSpPr>
@@ -8581,7 +8581,7 @@
       </p:sp>
       <p:sp>
         <p:nvSpPr>
-          <p:cNvPr id="4" name="Oval 3"/>
+          <p:cNvPr id="4" name="deckgen:decor"/>
           <p:cNvSpPr/>
           <p:nvPr/>
         </p:nvSpPr>
@@ -9823,7 +9823,7 @@
       <p:grpSpPr/>
       <p:sp>
         <p:nvSpPr>
-          <p:cNvPr id="2" name="Oval 1"/>
+          <p:cNvPr id="2" name="deckgen:decor"/>
           <p:cNvSpPr/>
           <p:nvPr/>
         </p:nvSpPr>
@@ -9853,7 +9853,7 @@
       </p:sp>
       <p:sp>
         <p:nvSpPr>
-          <p:cNvPr id="3" name="Oval 2"/>
+          <p:cNvPr id="3" name="deckgen:decor"/>
           <p:cNvSpPr/>
           <p:nvPr/>
         </p:nvSpPr>
@@ -9883,7 +9883,7 @@
       </p:sp>
       <p:sp>
         <p:nvSpPr>
-          <p:cNvPr id="4" name="Oval 3"/>
+          <p:cNvPr id="4" name="deckgen:decor"/>
           <p:cNvSpPr/>
           <p:nvPr/>
         </p:nvSpPr>
@@ -11238,7 +11238,7 @@
       <p:grpSpPr/>
       <p:sp>
         <p:nvSpPr>
-          <p:cNvPr id="2" name="Oval 1"/>
+          <p:cNvPr id="2" name="deckgen:decor"/>
           <p:cNvSpPr/>
           <p:nvPr/>
         </p:nvSpPr>
@@ -11268,7 +11268,7 @@
       </p:sp>
       <p:sp>
         <p:nvSpPr>
-          <p:cNvPr id="3" name="Oval 2"/>
+          <p:cNvPr id="3" name="deckgen:decor"/>
           <p:cNvSpPr/>
           <p:nvPr/>
         </p:nvSpPr>
@@ -11298,7 +11298,7 @@
       </p:sp>
       <p:sp>
         <p:nvSpPr>
-          <p:cNvPr id="4" name="Oval 3"/>
+          <p:cNvPr id="4" name="deckgen:decor"/>
           <p:cNvSpPr/>
           <p:nvPr/>
         </p:nvSpPr>
@@ -12653,7 +12653,7 @@
       <p:grpSpPr/>
       <p:sp>
         <p:nvSpPr>
-          <p:cNvPr id="2" name="Oval 1"/>
+          <p:cNvPr id="2" name="deckgen:decor"/>
           <p:cNvSpPr/>
           <p:nvPr/>
         </p:nvSpPr>
@@ -12683,7 +12683,7 @@
       </p:sp>
       <p:sp>
         <p:nvSpPr>
-          <p:cNvPr id="3" name="Oval 2"/>
+          <p:cNvPr id="3" name="deckgen:decor"/>
           <p:cNvSpPr/>
           <p:nvPr/>
         </p:nvSpPr>
@@ -12713,7 +12713,7 @@
       </p:sp>
       <p:sp>
         <p:nvSpPr>
-          <p:cNvPr id="4" name="Oval 3"/>
+          <p:cNvPr id="4" name="deckgen:decor"/>
           <p:cNvSpPr/>
           <p:nvPr/>
         </p:nvSpPr>
@@ -13680,7 +13680,7 @@
       <p:grpSpPr/>
       <p:sp>
         <p:nvSpPr>
-          <p:cNvPr id="2" name="Oval 1"/>
+          <p:cNvPr id="2" name="deckgen:decor"/>
           <p:cNvSpPr/>
           <p:nvPr/>
         </p:nvSpPr>
@@ -13710,7 +13710,7 @@
       </p:sp>
       <p:sp>
         <p:nvSpPr>
-          <p:cNvPr id="3" name="Oval 2"/>
+          <p:cNvPr id="3" name="deckgen:decor"/>
           <p:cNvSpPr/>
           <p:nvPr/>
         </p:nvSpPr>
@@ -13740,7 +13740,7 @@
       </p:sp>
       <p:sp>
         <p:nvSpPr>
-          <p:cNvPr id="4" name="Oval 3"/>
+          <p:cNvPr id="4" name="deckgen:decor"/>
           <p:cNvSpPr/>
           <p:nvPr/>
         </p:nvSpPr>
